--- a/templates/office/EMP_DEG_091_인프라생성요청_구성도.pptx
+++ b/templates/office/EMP_DEG_091_인프라생성요청_구성도.pptx
@@ -2682,7 +2682,7 @@
                 </a:solidFill>
                 <a:latin typeface="Malgun Gothic" panose="020B0503020000020004" pitchFamily="50" charset="-127"/>
               </a:rPr>
-              <a:t>SyncGuard AI </a:t>
+              <a:t>SyncFlow AI </a:t>
             </a:r>
             <a:r>
               <a:rPr lang="ko-KR" altLang="en-US" sz="3400" b="1">
@@ -2793,7 +2793,7 @@
                 </a:solidFill>
                 <a:latin typeface="Malgun Gothic"/>
               </a:rPr>
-              <a:t>마케팅허브·프로덕트랩 연계 · AWS EKS 5대 모듈(통합 웹 Client/fe / 업무 BE / 대외연계 API / AI Agent / Batch) · PostgreSQL 16(pgvector 1536d)</a:t>
+              <a:t>전자구매포털·피엘엠넥서스 연계 · AWS EKS 5대 모듈(통합 웹 Client/fe / 업무 BE / 대외연계 API / AI Agent / Batch) · PostgreSQL 16(pgvector 1536d)</a:t>
             </a:r>
           </a:p>
         </p:txBody>
@@ -2933,7 +2933,7 @@
                   <a:srgbClr val="F0E8E2"/>
                 </a:solidFill>
               </a:rPr>
-              <a:t>SyncGuard AI </a:t>
+              <a:t>SyncFlow AI </a:t>
             </a:r>
             <a:r>
               <a:rPr lang="ko-KR" altLang="en-US" sz="950">
@@ -3028,7 +3028,7 @@
                 </a:solidFill>
                 <a:latin typeface="Malgun Gothic"/>
               </a:rPr>
-              <a:t>v1.3 (BO/대외연계 ALB 분리 · BE/API➔Agent 호출 · AI 피크프레임+웹 장면보정 · S3 Intelligent-Tiering · AP 기본스펙 · 방화벽 URL 반영)</a:t>
+              <a:t>v1.3 (BO/대외연계 ALB 분리 · BE/API➔Agent 호출 · AI 도면스냅샷+웹 장면보정 · S3 Intelligent-Tiering · HB 표준스펙 · 방화벽 URL 반영)</a:t>
             </a:r>
             <a:endParaRPr lang="ko-KR" altLang="en-US" sz="950">
               <a:solidFill>
@@ -3594,7 +3594,7 @@
                 </a:solidFill>
                 <a:latin typeface="Malgun Gothic"/>
               </a:rPr>
-              <a:t>사내 SSO/IAM · MarketingHub(의뢰/결과 HTML·JSON 연동) · ProductLab(02:00배치) · 네이버/패들OCR</a:t>
+              <a:t>사내 SSO/IAM · SRM-Portal(의뢰/결과 HTML·JSON 연동) · PLM-Nexus(02:00배치) · 엔터프라이즈 비전/패들OCR</a:t>
             </a:r>
             <a:endParaRPr lang="ko-KR" altLang="en-US" sz="950">
               <a:solidFill>
@@ -3771,7 +3771,7 @@
           <p:cNvPr id="30" name="TextBox 29">
             <a:extLst>
               <a:ext uri="{FF2B5EF4-FFF2-40B4-BE49-F238E27FC236}">
-                <a16:creationId xmlns:a16="http://schemas.microsoft.com/office/drawing/2014/main" id="{DCE1FE2D-D2BC-2FDA-49C4-D2003B59F3A3}"/>
+                <a16:creationId xmlns:a16="http://schemas.microsoft.com/office/drawing/2014/main" id="{DCE1FE2D-D2BC-2IATF-49C4-D2003B59F3A3}"/>
               </a:ext>
             </a:extLst>
           </p:cNvPr>
@@ -4028,7 +4028,7 @@
             <a:r>
               <a:rPr sz="800" b="1">
                 <a:solidFill>
-                  <a:srgbClr val="1E293B"/>
+                  <a:srgbClr val="0F2942"/>
                 </a:solidFill>
                 <a:latin typeface="Malgun Gothic"/>
               </a:rPr>
@@ -4074,7 +4074,7 @@
                 </a:solidFill>
                 <a:latin typeface="Malgun Gothic"/>
               </a:rPr>
-              <a:t>마케터(마케팅허브 심의의뢰 · 결과 조회)</a:t>
+              <a:t>구매담당자(전자구매포털 검증요청 · 결과 조회)</a:t>
             </a:r>
           </a:p>
           <a:p>
@@ -4086,7 +4086,7 @@
                 </a:solidFill>
                 <a:latin typeface="Malgun Gothic"/>
               </a:rPr>
-              <a:t>RA·관리자(BO ALB ➔ 통합웹 :3104)</a:t>
+              <a:t>QA·관리자(BO ALB ➔ 통합웹 :3104)</a:t>
             </a:r>
           </a:p>
         </p:txBody>
@@ -4230,7 +4230,7 @@
             <a:r>
               <a:rPr sz="740" b="1">
                 <a:solidFill>
-                  <a:srgbClr val="1E293B"/>
+                  <a:srgbClr val="0F2942"/>
                 </a:solidFill>
                 <a:latin typeface="Malgun Gothic"/>
               </a:rPr>
@@ -4288,7 +4288,7 @@
                 </a:solidFill>
                 <a:latin typeface="Malgun Gothic"/>
               </a:rPr>
-              <a:t>네이버 클로바 OCR(*.apigw.ntruss.com) / 패들OCR</a:t>
+              <a:t>엔터프라이즈 비전 OCR(ocr-api.hanbitglobal.internal) / 패들OCR</a:t>
             </a:r>
           </a:p>
         </p:txBody>
@@ -4389,7 +4389,7 @@
                 </a:solidFill>
                 <a:latin typeface="KoPub돋움체 Light"/>
               </a:rPr>
-              <a:t>MKTHUB</a:t>
+              <a:t>SRMP</a:t>
             </a:r>
           </a:p>
         </p:txBody>
@@ -4427,11 +4427,11 @@
             <a:r>
               <a:rPr sz="730" b="1">
                 <a:solidFill>
-                  <a:srgbClr val="1E293B"/>
+                  <a:srgbClr val="0F2942"/>
                 </a:solidFill>
                 <a:latin typeface="Malgun Gothic"/>
               </a:rPr>
-              <a:t>MarketingHub / ProductLab</a:t>
+              <a:t>SRM-Portal / PLM-Nexus</a:t>
             </a:r>
           </a:p>
         </p:txBody>
@@ -4469,11 +4469,11 @@
             <a:r>
               <a:rPr sz="610" b="0">
                 <a:solidFill>
-                  <a:srgbClr val="1E293B"/>
+                  <a:srgbClr val="0F2942"/>
                 </a:solidFill>
                 <a:latin typeface="Malgun Gothic"/>
               </a:rPr>
-              <a:t>마케팅허브 ➔ 대외연계 ALB(:443) 단독 오픈</a:t>
+              <a:t>전자구매포털 ➔ 대외연계 ALB(:443) 단독 오픈</a:t>
             </a:r>
           </a:p>
           <a:p>
@@ -4485,7 +4485,7 @@
                 </a:solidFill>
                 <a:latin typeface="Malgun Gothic"/>
               </a:rPr>
-              <a:t>ProductLab: 매일 02:00 일배치 / [Option] 레몬</a:t>
+              <a:t>PLM-Nexus: 매일 02:00 일배치 / [Option] HB-Monitor</a:t>
             </a:r>
           </a:p>
         </p:txBody>
@@ -4584,7 +4584,7 @@
             <a:r>
               <a:rPr sz="730" b="1">
                 <a:solidFill>
-                  <a:srgbClr val="1E293B"/>
+                  <a:srgbClr val="0F2942"/>
                 </a:solidFill>
                 <a:latin typeface="Malgun Gothic"/>
               </a:rPr>
@@ -5176,11 +5176,11 @@
             <a:r>
               <a:rPr sz="700" b="1">
                 <a:solidFill>
-                  <a:srgbClr val="1E293B"/>
+                  <a:srgbClr val="0F2942"/>
                 </a:solidFill>
                 <a:latin typeface="Malgun Gothic"/>
               </a:rPr>
-              <a:t>syncguard-ai-bo-prv-alb</a:t>
+              <a:t>syncflow-ai-bo-prv-alb</a:t>
             </a:r>
           </a:p>
         </p:txBody>
@@ -5843,7 +5843,7 @@
             <a:r>
               <a:rPr sz="540" b="1">
                 <a:solidFill>
-                  <a:srgbClr val="1E293B"/>
+                  <a:srgbClr val="0F2942"/>
                 </a:solidFill>
                 <a:latin typeface="Malgun Gothic"/>
               </a:rPr>
@@ -5859,7 +5859,7 @@
                 </a:solidFill>
                 <a:latin typeface="Malgun Gothic"/>
               </a:rPr>
-              <a:t>BO➔Agent 호출 · 상충탐지 · RA확정 · 백오피스</a:t>
+              <a:t>BO➔Agent 호출 · 상충탐지 · QA확정 · 백오피스</a:t>
             </a:r>
           </a:p>
         </p:txBody>
@@ -6080,11 +6080,11 @@
             <a:r>
               <a:rPr sz="540" b="1">
                 <a:solidFill>
-                  <a:srgbClr val="1E293B"/>
+                  <a:srgbClr val="0F2942"/>
                 </a:solidFill>
                 <a:latin typeface="Malgun Gothic"/>
               </a:rPr>
-              <a:t>마케팅허브 전용 ALB 인바운드 · 결과 웹훅 회신</a:t>
+              <a:t>전자구매포털 전용 ALB 인바운드 · 결과 웹훅 회신</a:t>
             </a:r>
           </a:p>
           <a:p>
@@ -6184,7 +6184,7 @@
                 </a:solidFill>
                 <a:latin typeface="Malgun Gothic"/>
               </a:rPr>
-              <a:t>③ AI Agent (심의 에이전트)</a:t>
+              <a:t>③ AI Agent (검증 에이전트)</a:t>
             </a:r>
           </a:p>
         </p:txBody>
@@ -6317,11 +6317,11 @@
             <a:r>
               <a:rPr sz="540" b="1">
                 <a:solidFill>
-                  <a:srgbClr val="1E293B"/>
+                  <a:srgbClr val="0F2942"/>
                 </a:solidFill>
                 <a:latin typeface="Malgun Gothic"/>
               </a:rPr>
-              <a:t>OpenCV 피크프레임 1차 자동추출 + 웹 보정장면 분석</a:t>
+              <a:t>OpenCV 도면스냅샷 1차 자동추출 + 웹 보정장면 분석</a:t>
             </a:r>
           </a:p>
           <a:p>
@@ -6333,7 +6333,7 @@
                 </a:solidFill>
                 <a:latin typeface="Malgun Gothic"/>
               </a:rPr>
-              <a:t>네이버/패들 OCR · 동시 4건 세마포어 + QUEUED</a:t>
+              <a:t>엔터프라이즈 멀티모달 OCR · 동시 4건 세마포어 + QUEUED</a:t>
             </a:r>
           </a:p>
         </p:txBody>
@@ -6554,11 +6554,11 @@
             <a:r>
               <a:rPr sz="540" b="1">
                 <a:solidFill>
-                  <a:srgbClr val="1E293B"/>
+                  <a:srgbClr val="0F2942"/>
                 </a:solidFill>
                 <a:latin typeface="Malgun Gothic"/>
               </a:rPr>
-              <a:t>매일 02:00 ProductLab 전성분·실증</a:t>
+              <a:t>매일 02:00 PLM-Nexus 자재BOM·시험검증</a:t>
             </a:r>
           </a:p>
           <a:p>
@@ -6577,7 +6577,7 @@
                 </a:solidFill>
                 <a:latin typeface="Malgun Gothic"/>
               </a:rPr>
-              <a:t>02:30 KT레몬 · 법령 Diff 벡터화</a:t>
+              <a:t>02:30 HB-Monitor · 법령 Diff 벡터화</a:t>
             </a:r>
           </a:p>
         </p:txBody>
@@ -6819,7 +6819,7 @@
             <a:r>
               <a:rPr sz="740" b="1">
                 <a:solidFill>
-                  <a:srgbClr val="1E293B"/>
+                  <a:srgbClr val="0F2942"/>
                 </a:solidFill>
                 <a:latin typeface="Malgun Gothic"/>
               </a:rPr>
@@ -6865,7 +6865,7 @@
                 </a:solidFill>
                 <a:latin typeface="Malgun Gothic"/>
               </a:rPr>
-              <a:t>hb_syncguard_ai DB  ·  :5432</a:t>
+              <a:t>hb_syncflow_ai DB  ·  :5432</a:t>
             </a:r>
           </a:p>
         </p:txBody>
@@ -6903,11 +6903,11 @@
             <a:r>
               <a:rPr sz="630" b="0">
                 <a:solidFill>
-                  <a:srgbClr val="1E293B"/>
+                  <a:srgbClr val="0F2942"/>
                 </a:solidFill>
                 <a:latin typeface="Malgun Gothic"/>
               </a:rPr>
-              <a:t>• 심의 마스터 · 대기열(QUEUED/FAILED) · 과거 상충 탐지</a:t>
+              <a:t>• 검증 마스터 · 대기열(QUEUED/FAILED) · 과거 상충 탐지</a:t>
             </a:r>
           </a:p>
           <a:p>
@@ -6922,7 +6922,7 @@
             <a:r>
               <a:rPr sz="630" b="0">
                 <a:solidFill>
-                  <a:srgbClr val="1E293B"/>
+                  <a:srgbClr val="0F2942"/>
                 </a:solidFill>
                 <a:latin typeface="Malgun Gothic"/>
               </a:rPr>
@@ -6941,11 +6941,11 @@
             <a:r>
               <a:rPr sz="630" b="0">
                 <a:solidFill>
-                  <a:srgbClr val="1E293B"/>
+                  <a:srgbClr val="0F2942"/>
                 </a:solidFill>
                 <a:latin typeface="Malgun Gothic"/>
               </a:rPr>
-              <a:t>• 금지/주의 표현사전 · ProductLab 전성분/실증 캐시</a:t>
+              <a:t>• 금지/주의 표현사전 · PLM-Nexus 자재BOM/시험검증 캐시</a:t>
             </a:r>
           </a:p>
         </p:txBody>
@@ -7081,11 +7081,11 @@
             <a:r>
               <a:rPr sz="610" b="0">
                 <a:solidFill>
-                  <a:srgbClr val="1E293B"/>
+                  <a:srgbClr val="0F2942"/>
                 </a:solidFill>
                 <a:latin typeface="Malgun Gothic"/>
               </a:rPr>
-              <a:t>규제 조항 &amp; 기술원 실증보고서 벡터 색인 (1536d)</a:t>
+              <a:t>규제 조항 &amp; 기술원 시험검증보고서 벡터 색인 (1536d)</a:t>
             </a:r>
           </a:p>
           <a:p>
@@ -7198,7 +7198,7 @@
             <a:r>
               <a:rPr sz="730" b="1">
                 <a:solidFill>
-                  <a:srgbClr val="1E293B"/>
+                  <a:srgbClr val="0F2942"/>
                 </a:solidFill>
                 <a:latin typeface="Malgun Gothic"/>
               </a:rPr>
@@ -7256,7 +7256,7 @@
                 </a:solidFill>
                 <a:latin typeface="Malgun Gothic"/>
               </a:rPr>
-              <a:t>300MB 시안·영상 · AI 추출 및 웹 보정 장면 · 리포트</a:t>
+              <a:t>300MB 계약·도서·영상 · AI 추출 및 웹 보정 장면 · 리포트</a:t>
             </a:r>
           </a:p>
         </p:txBody>
@@ -7852,7 +7852,7 @@
                 </a:solidFill>
                 <a:latin typeface="Malgun Gothic"/>
               </a:rPr>
-              <a:t>네이버OCR(*.apigw.ntruss.com) · LLM · 마케팅허브 방화벽 오픈</a:t>
+              <a:t>비전OCR(ocr-api.hanbitglobal.internal) · LLM · 전자구매포털 방화벽 오픈</a:t>
             </a:r>
           </a:p>
           <a:p>
@@ -8008,7 +8008,7 @@
             <a:r>
               <a:rPr sz="730" b="1">
                 <a:solidFill>
-                  <a:srgbClr val="1E293B"/>
+                  <a:srgbClr val="0F2942"/>
                 </a:solidFill>
                 <a:latin typeface="Malgun Gothic"/>
               </a:rPr>
@@ -8168,7 +8168,7 @@
             <a:r>
               <a:rPr sz="730" b="1">
                 <a:solidFill>
-                  <a:srgbClr val="1E293B"/>
+                  <a:srgbClr val="0F2942"/>
                 </a:solidFill>
                 <a:latin typeface="Malgun Gothic"/>
               </a:rPr>
@@ -8352,7 +8352,7 @@
             <a:r>
               <a:rPr sz="700" b="1">
                 <a:solidFill>
-                  <a:srgbClr val="1E293B"/>
+                  <a:srgbClr val="0F2942"/>
                 </a:solidFill>
                 <a:latin typeface="Malgun Gothic"/>
               </a:rPr>
@@ -8396,7 +8396,7 @@
             <a:r>
               <a:rPr sz="700" b="1">
                 <a:solidFill>
-                  <a:srgbClr val="1E293B"/>
+                  <a:srgbClr val="0F2942"/>
                 </a:solidFill>
                 <a:latin typeface="Malgun Gothic"/>
               </a:rPr>
@@ -8440,7 +8440,7 @@
             <a:r>
               <a:rPr sz="690" b="1">
                 <a:solidFill>
-                  <a:srgbClr val="1E293B"/>
+                  <a:srgbClr val="0F2942"/>
                 </a:solidFill>
                 <a:latin typeface="Malgun Gothic"/>
               </a:rPr>
@@ -8484,7 +8484,7 @@
             <a:r>
               <a:rPr sz="680" b="1">
                 <a:solidFill>
-                  <a:srgbClr val="1E293B"/>
+                  <a:srgbClr val="0F2942"/>
                 </a:solidFill>
                 <a:latin typeface="Malgun Gothic"/>
               </a:rPr>
@@ -8587,11 +8587,11 @@
             <a:r>
               <a:rPr sz="700" b="1">
                 <a:solidFill>
-                  <a:srgbClr val="1E293B"/>
+                  <a:srgbClr val="0F2942"/>
                 </a:solidFill>
                 <a:latin typeface="Malgun Gothic"/>
               </a:rPr>
-              <a:t>syncguard-ai-api-prv-alb</a:t>
+              <a:t>syncflow-ai-api-prv-alb</a:t>
             </a:r>
           </a:p>
         </p:txBody>
@@ -8633,7 +8633,7 @@
                 </a:solidFill>
                 <a:latin typeface="Malgun Gothic"/>
               </a:rPr>
-              <a:t>[대외연계 ALB] 마케팅허브만 오픈(:443)</a:t>
+              <a:t>[대외연계 ALB] 전자구매포털만 오픈(:443)</a:t>
             </a:r>
           </a:p>
         </p:txBody>
@@ -8771,7 +8771,7 @@
                 </a:solidFill>
                 <a:latin typeface="Malgun Gothic"/>
               </a:rPr>
-              <a:t>★ 인프라팀 의견 반영: BO ALB(사용자대역 오픈) / 대외연계 ALB(마케팅허브만 오픈) 물리 분리 · BE/API➔Agent EKS Service 통신 · S3 Intelligent-Tiering · AP 기본스펙</a:t>
+              <a:t>★ 인프라팀 의견 반영: BO ALB(사용자대역 오픈) / 대외연계 ALB(전자구매포털만 오픈) 물리 분리 · BE/API➔Agent EKS Service 통신 · S3 Intelligent-Tiering · HB 표준스펙</a:t>
             </a:r>
           </a:p>
         </p:txBody>
@@ -8870,7 +8870,7 @@
             <a:r>
               <a:rPr sz="750" b="1">
                 <a:solidFill>
-                  <a:srgbClr val="1E293B"/>
+                  <a:srgbClr val="0F2942"/>
                 </a:solidFill>
                 <a:latin typeface="Malgun Gothic"/>
               </a:rPr>
@@ -9072,11 +9072,11 @@
             <a:r>
               <a:rPr sz="740" b="1">
                 <a:solidFill>
-                  <a:srgbClr val="1E293B"/>
+                  <a:srgbClr val="0F2942"/>
                 </a:solidFill>
                 <a:latin typeface="Malgun Gothic"/>
               </a:rPr>
-              <a:t>기업용 LLM &amp; 네이버 OCR (:443)</a:t>
+              <a:t>기업용 LLM &amp; 엔터프라이즈 비전 OCR (:443)</a:t>
             </a:r>
           </a:p>
         </p:txBody>
@@ -9130,7 +9130,7 @@
                 </a:solidFill>
                 <a:latin typeface="Malgun Gothic"/>
               </a:rPr>
-              <a:t>네이버 클로바 OCR(*.apigw.ntruss.com) / 패들OCR</a:t>
+              <a:t>엔터프라이즈 비전 OCR(ocr-api.hanbitglobal.internal) / 패들OCR</a:t>
             </a:r>
           </a:p>
         </p:txBody>
@@ -9231,7 +9231,7 @@
                 </a:solidFill>
                 <a:latin typeface="KoPub돋움체 Light"/>
               </a:rPr>
-              <a:t>MKTHUB</a:t>
+              <a:t>SRMP</a:t>
             </a:r>
           </a:p>
         </p:txBody>
@@ -9269,11 +9269,11 @@
             <a:r>
               <a:rPr sz="720" b="1">
                 <a:solidFill>
-                  <a:srgbClr val="1E293B"/>
+                  <a:srgbClr val="0F2942"/>
                 </a:solidFill>
                 <a:latin typeface="Malgun Gothic"/>
               </a:rPr>
-              <a:t>MarketingHub / ProductLab 방화벽</a:t>
+              <a:t>SRM-Portal / PLM-Nexus 방화벽</a:t>
             </a:r>
           </a:p>
         </p:txBody>
@@ -9315,7 +9315,7 @@
                 </a:solidFill>
                 <a:latin typeface="Malgun Gothic"/>
               </a:rPr>
-              <a:t>마케팅허브 ➔ 대외연계 ALB(:443) 단독 오픈</a:t>
+              <a:t>전자구매포털 ➔ 대외연계 ALB(:443) 단독 오픈</a:t>
             </a:r>
           </a:p>
           <a:p>
@@ -9327,7 +9327,7 @@
                 </a:solidFill>
                 <a:latin typeface="Malgun Gothic"/>
               </a:rPr>
-              <a:t>ProductLab: 매일 02:00 일배치 / [Option] 레몬</a:t>
+              <a:t>PLM-Nexus: 매일 02:00 일배치 / [Option] HB-Monitor</a:t>
             </a:r>
           </a:p>
         </p:txBody>
@@ -9426,7 +9426,7 @@
             <a:r>
               <a:rPr sz="720" b="1">
                 <a:solidFill>
-                  <a:srgbClr val="1E293B"/>
+                  <a:srgbClr val="0F2942"/>
                 </a:solidFill>
                 <a:latin typeface="Malgun Gothic"/>
               </a:rPr>
@@ -10025,7 +10025,7 @@
                 </a:solidFill>
                 <a:latin typeface="Malgun Gothic"/>
               </a:rPr>
-              <a:t>★ BO: syncguard-ai-bo-prv-alb</a:t>
+              <a:t>★ BO: syncflow-ai-bo-prv-alb</a:t>
             </a:r>
           </a:p>
         </p:txBody>
@@ -10105,7 +10105,7 @@
             <a:r>
               <a:rPr sz="640" b="0">
                 <a:solidFill>
-                  <a:srgbClr val="1E293B"/>
+                  <a:srgbClr val="0F2942"/>
                 </a:solidFill>
                 <a:latin typeface="Malgun Gothic"/>
               </a:rPr>
@@ -10700,11 +10700,11 @@
             <a:r>
               <a:rPr sz="530" b="0">
                 <a:solidFill>
-                  <a:srgbClr val="1E293B"/>
+                  <a:srgbClr val="0F2942"/>
                 </a:solidFill>
                 <a:latin typeface="Malgun Gothic"/>
               </a:rPr>
-              <a:t>BO➔Agent 호출 · 상충탐지 · RA확정 · 백오피스</a:t>
+              <a:t>BO➔Agent 호출 · 상충탐지 · QA확정 · 백오피스</a:t>
             </a:r>
           </a:p>
         </p:txBody>
@@ -10929,7 +10929,7 @@
                 </a:solidFill>
                 <a:latin typeface="Malgun Gothic"/>
               </a:rPr>
-              <a:t>마케팅허브 전용 ALB 인바운드 · 결과 웹훅 회신</a:t>
+              <a:t>전자구매포털 전용 ALB 인바운드 · 결과 웹훅 회신</a:t>
             </a:r>
           </a:p>
           <a:p>
@@ -10937,7 +10937,7 @@
             <a:r>
               <a:rPr sz="530" b="0">
                 <a:solidFill>
-                  <a:srgbClr val="1E293B"/>
+                  <a:srgbClr val="0F2942"/>
                 </a:solidFill>
                 <a:latin typeface="Malgun Gothic"/>
               </a:rPr>
@@ -11166,7 +11166,7 @@
                 </a:solidFill>
                 <a:latin typeface="Malgun Gothic"/>
               </a:rPr>
-              <a:t>OpenCV 피크프레임 1차 자동추출 + 웹 보정장면 분석</a:t>
+              <a:t>OpenCV 도면스냅샷 1차 자동추출 + 웹 보정장면 분석</a:t>
             </a:r>
           </a:p>
           <a:p>
@@ -11174,11 +11174,11 @@
             <a:r>
               <a:rPr sz="530" b="0">
                 <a:solidFill>
-                  <a:srgbClr val="1E293B"/>
+                  <a:srgbClr val="0F2942"/>
                 </a:solidFill>
                 <a:latin typeface="Malgun Gothic"/>
               </a:rPr>
-              <a:t>네이버/패들 OCR · 동시 4건 세마포어 + QUEUED</a:t>
+              <a:t>엔터프라이즈 멀티모달 OCR · 동시 4건 세마포어 + QUEUED</a:t>
             </a:r>
           </a:p>
         </p:txBody>
@@ -11403,7 +11403,7 @@
                 </a:solidFill>
                 <a:latin typeface="Malgun Gothic"/>
               </a:rPr>
-              <a:t>매일 02:00 ProductLab 전성분·실증</a:t>
+              <a:t>매일 02:00 PLM-Nexus 자재BOM·시험검증</a:t>
             </a:r>
           </a:p>
           <a:p>
@@ -11422,7 +11422,7 @@
                 </a:solidFill>
                 <a:latin typeface="Malgun Gothic"/>
               </a:rPr>
-              <a:t>02:30 KT레몬 · 법령 Diff 벡터화</a:t>
+              <a:t>02:30 HB-Monitor · 법령 Diff 벡터화</a:t>
             </a:r>
           </a:p>
         </p:txBody>
@@ -11706,11 +11706,11 @@
             <a:r>
               <a:rPr sz="630" b="1">
                 <a:solidFill>
-                  <a:srgbClr val="1E293B"/>
+                  <a:srgbClr val="0F2942"/>
                 </a:solidFill>
                 <a:latin typeface="Malgun Gothic"/>
               </a:rPr>
-              <a:t>hb_syncguard_ai (:5432)</a:t>
+              <a:t>hb_syncflow_ai (:5432)</a:t>
             </a:r>
           </a:p>
         </p:txBody>
@@ -11760,7 +11760,7 @@
             <a:r>
               <a:rPr sz="620" b="0">
                 <a:solidFill>
-                  <a:srgbClr val="1E293B"/>
+                  <a:srgbClr val="0F2942"/>
                 </a:solidFill>
                 <a:latin typeface="Malgun Gothic"/>
               </a:rPr>
@@ -11772,7 +11772,7 @@
             <a:r>
               <a:rPr sz="620" b="0">
                 <a:solidFill>
-                  <a:srgbClr val="1E293B"/>
+                  <a:srgbClr val="0F2942"/>
                 </a:solidFill>
                 <a:latin typeface="Malgun Gothic"/>
               </a:rPr>
@@ -11912,7 +11912,7 @@
             <a:r>
               <a:rPr sz="610" b="1">
                 <a:solidFill>
-                  <a:srgbClr val="1E293B"/>
+                  <a:srgbClr val="0F2942"/>
                 </a:solidFill>
                 <a:latin typeface="Malgun Gothic"/>
               </a:rPr>
@@ -12083,11 +12083,11 @@
             <a:r>
               <a:rPr sz="610" b="0">
                 <a:solidFill>
-                  <a:srgbClr val="1E293B"/>
+                  <a:srgbClr val="0F2942"/>
                 </a:solidFill>
                 <a:latin typeface="Malgun Gothic"/>
               </a:rPr>
-              <a:t>300MB 시안·영상 · AI 추출 및 웹 보정 장면 · 리포트</a:t>
+              <a:t>300MB 계약·도서·영상 · AI 추출 및 웹 보정 장면 · 리포트</a:t>
             </a:r>
           </a:p>
         </p:txBody>
@@ -12683,7 +12683,7 @@
                 </a:solidFill>
                 <a:latin typeface="Malgun Gothic"/>
               </a:rPr>
-              <a:t>네이버OCR(*.apigw.ntruss.com) · LLM · 마케팅허브 방화벽 오픈</a:t>
+              <a:t>비전OCR(ocr-api.hanbitglobal.internal) · LLM · 전자구매포털 방화벽 오픈</a:t>
             </a:r>
           </a:p>
           <a:p>
@@ -12881,11 +12881,11 @@
             <a:r>
               <a:rPr sz="620" b="1">
                 <a:solidFill>
-                  <a:srgbClr val="1E293B"/>
+                  <a:srgbClr val="0F2942"/>
                 </a:solidFill>
                 <a:latin typeface="Malgun Gothic"/>
               </a:rPr>
-              <a:t>레포지토리명: syncguard-ai</a:t>
+              <a:t>레포지토리명: syncflow-ai</a:t>
             </a:r>
           </a:p>
           <a:p>
@@ -13041,7 +13041,7 @@
             <a:r>
               <a:rPr sz="620" b="1">
                 <a:solidFill>
-                  <a:srgbClr val="1E293B"/>
+                  <a:srgbClr val="0F2942"/>
                 </a:solidFill>
                 <a:latin typeface="Malgun Gothic"/>
               </a:rPr>
@@ -13422,7 +13422,7 @@
                 </a:solidFill>
                 <a:latin typeface="Malgun Gothic"/>
               </a:rPr>
-              <a:t>★ 연계: syncguard-ai-api-prv-alb</a:t>
+              <a:t>★ 연계: syncflow-ai-api-prv-alb</a:t>
             </a:r>
           </a:p>
         </p:txBody>
@@ -13464,7 +13464,7 @@
                 </a:solidFill>
                 <a:latin typeface="Malgun Gothic"/>
               </a:rPr>
-              <a:t>[대외연계 ALB] 마케팅허브만 오픈(:443)</a:t>
+              <a:t>[대외연계 ALB] 전자구매포털만 오픈(:443)</a:t>
             </a:r>
           </a:p>
         </p:txBody>
@@ -13502,7 +13502,7 @@
             <a:r>
               <a:rPr sz="640" b="0">
                 <a:solidFill>
-                  <a:srgbClr val="1E293B"/>
+                  <a:srgbClr val="0F2942"/>
                 </a:solidFill>
                 <a:latin typeface="Malgun Gothic"/>
               </a:rPr>
@@ -13920,7 +13920,7 @@
                 </a:solidFill>
                 <a:latin typeface="Malgun Gothic"/>
               </a:rPr>
-              <a:t>• GitLab 저장소(syncguard-ai) + ArgoCD / CodeDeploy 컨테이너 자동 배포</a:t>
+              <a:t>• GitLab 저장소(syncflow-ai) + ArgoCD / CodeDeploy 컨테이너 자동 배포</a:t>
             </a:r>
           </a:p>
           <a:p>
@@ -14108,7 +14108,7 @@
                 </a:solidFill>
                 <a:latin typeface="Malgun Gothic"/>
               </a:rPr>
-              <a:t>• 마케팅허브(MarketingHub): 대외연계 전용 ALB(마케팅허브만 오픈) 경유 의뢰 수신 및 결과(HTML/JSON) 콜백 연동</a:t>
+              <a:t>• 전자구매포털(SRM-Portal): 대외연계 전용 ALB(전자구매포털만 오픈) 경유 의뢰 수신 및 결과(HTML/JSON) 콜백 연동</a:t>
             </a:r>
           </a:p>
           <a:p>
@@ -14120,7 +14120,7 @@
                 </a:solidFill>
                 <a:latin typeface="Malgun Gothic"/>
               </a:rPr>
-              <a:t>• 프로덕트랩(ProductLab): 매일 새벽 02:00 일배치(Batch :18084) 전성분·처방·임상보고서 수집</a:t>
+              <a:t>• 피엘엠넥서스(PLM-Nexus): 매일 새벽 02:00 일배치(Batch :18084) 자재BOM·설계사양·신뢰성보고서 수집</a:t>
             </a:r>
           </a:p>
           <a:p>
@@ -14240,7 +14240,7 @@
                 </a:solidFill>
                 <a:latin typeface="Malgun Gothic"/>
               </a:rPr>
-              <a:t>대외 AI Gateway / LLM · 네이버 OCR 연동</a:t>
+              <a:t>대외 AI Gateway / LLM · 엔터프라이즈 비전 OCR 연동</a:t>
             </a:r>
           </a:p>
         </p:txBody>
@@ -14290,11 +14290,11 @@
             <a:r>
               <a:rPr sz="740" b="0">
                 <a:solidFill>
-                  <a:srgbClr val="1E293B"/>
+                  <a:srgbClr val="0F2942"/>
                 </a:solidFill>
                 <a:latin typeface="Malgun Gothic"/>
               </a:rPr>
-              <a:t>• 네이버 클로바 OCR: *.apigw.ntruss.com (연구소 계약)</a:t>
+              <a:t>• 엔터프라이즈 비전 OCR: ocr-api.hanbitglobal.internal (연구소 계약)</a:t>
             </a:r>
           </a:p>
           <a:p>
@@ -14302,7 +14302,7 @@
             <a:r>
               <a:rPr sz="740" b="0">
                 <a:solidFill>
-                  <a:srgbClr val="1E293B"/>
+                  <a:srgbClr val="0F2942"/>
                 </a:solidFill>
                 <a:latin typeface="Malgun Gothic"/>
               </a:rPr>
@@ -14572,11 +14572,11 @@
             <a:r>
               <a:rPr sz="730" b="0">
                 <a:solidFill>
-                  <a:srgbClr val="1E293B"/>
+                  <a:srgbClr val="0F2942"/>
                 </a:solidFill>
                 <a:latin typeface="Malgun Gothic"/>
               </a:rPr>
-              <a:t>  - BO ALB (syncguard-ai-bo-prv-alb): 사용자대역 오픈</a:t>
+              <a:t>  - BO ALB (syncflow-ai-bo-prv-alb): 사용자대역 오픈</a:t>
             </a:r>
           </a:p>
           <a:p>
@@ -14584,11 +14584,11 @@
             <a:r>
               <a:rPr sz="730" b="0">
                 <a:solidFill>
-                  <a:srgbClr val="1E293B"/>
+                  <a:srgbClr val="0F2942"/>
                 </a:solidFill>
                 <a:latin typeface="Malgun Gothic"/>
               </a:rPr>
-              <a:t>    ➔ 통합웹(:3104) · 업무BE(:18080) [claim.hanbitglobal.com]</a:t>
+              <a:t>    ➔ 통합웹(:3104) · 업무BE(:18080) [Spec.hanbitglobal.com]</a:t>
             </a:r>
           </a:p>
           <a:p>
@@ -14596,11 +14596,11 @@
             <a:r>
               <a:rPr sz="730" b="0">
                 <a:solidFill>
-                  <a:srgbClr val="1E293B"/>
+                  <a:srgbClr val="0F2942"/>
                 </a:solidFill>
                 <a:latin typeface="Malgun Gothic"/>
               </a:rPr>
-              <a:t>  - 대외연계 ALB (syncguard-ai-api-prv-alb): 마케팅허브만 오픈</a:t>
+              <a:t>  - 대외연계 ALB (syncflow-ai-api-prv-alb): 전자구매포털만 오픈</a:t>
             </a:r>
           </a:p>
           <a:p>
@@ -14608,11 +14608,11 @@
             <a:r>
               <a:rPr sz="730" b="0">
                 <a:solidFill>
-                  <a:srgbClr val="1E293B"/>
+                  <a:srgbClr val="0F2942"/>
                 </a:solidFill>
                 <a:latin typeface="Malgun Gothic"/>
               </a:rPr>
-              <a:t>    ➔ 대외연계 API(:18085) [syncguard-api.hanbitglobal.com]</a:t>
+              <a:t>    ➔ 대외연계 API(:18085) [syncflow-api.hanbitglobal.com]</a:t>
             </a:r>
           </a:p>
         </p:txBody>
@@ -14770,7 +14770,7 @@
             <a:r>
               <a:rPr sz="730" b="0">
                 <a:solidFill>
-                  <a:srgbClr val="1E293B"/>
+                  <a:srgbClr val="0F2942"/>
                 </a:solidFill>
                 <a:latin typeface="Malgun Gothic"/>
               </a:rPr>
@@ -14782,7 +14782,7 @@
             <a:r>
               <a:rPr sz="730" b="0">
                 <a:solidFill>
-                  <a:srgbClr val="1E293B"/>
+                  <a:srgbClr val="0F2942"/>
                 </a:solidFill>
                 <a:latin typeface="Malgun Gothic"/>
               </a:rPr>
@@ -14794,7 +14794,7 @@
             <a:r>
               <a:rPr sz="730" b="0">
                 <a:solidFill>
-                  <a:srgbClr val="1E293B"/>
+                  <a:srgbClr val="0F2942"/>
                 </a:solidFill>
                 <a:latin typeface="Malgun Gothic"/>
               </a:rPr>
@@ -14806,7 +14806,7 @@
             <a:r>
               <a:rPr sz="730" b="0">
                 <a:solidFill>
-                  <a:srgbClr val="1E293B"/>
+                  <a:srgbClr val="0F2942"/>
                 </a:solidFill>
                 <a:latin typeface="Malgun Gothic"/>
               </a:rPr>
@@ -14818,7 +14818,7 @@
             <a:r>
               <a:rPr sz="730" b="0">
                 <a:solidFill>
-                  <a:srgbClr val="1E293B"/>
+                  <a:srgbClr val="0F2942"/>
                 </a:solidFill>
                 <a:latin typeface="Malgun Gothic"/>
               </a:rPr>
@@ -14993,7 +14993,7 @@
                 </a:solidFill>
                 <a:latin typeface="Malgun Gothic"/>
               </a:rPr>
-              <a:t>AP 기본 제공 스펙 우선 구성 (성능테스트 시 OOM 등 서비스 중단 반복 시 스펙 증설 요청) · PRD / STG / DEV</a:t>
+              <a:t>HB 표준 제공 스펙 우선 구성 (성능테스트 시 OOM 등 서비스 중단 반복 시 스펙 증설 요청) · PRD / STG / DEV</a:t>
             </a:r>
           </a:p>
         </p:txBody>
@@ -15064,11 +15064,11 @@
             <a:r>
               <a:rPr sz="660" b="0">
                 <a:solidFill>
-                  <a:srgbClr val="1E293B"/>
+                  <a:srgbClr val="0F2942"/>
                 </a:solidFill>
                 <a:latin typeface="Malgun Gothic"/>
               </a:rPr>
-              <a:t>• 영상 장면 보정: AI 1차 추출 후 웹 화면에서 동영상 재생·특정화면 멈춰 장면 추가 및 AI 생성 장면 편집·삭제</a:t>
+              <a:t>• 영상 장면 보정: AI 1차 추출 후 웹 화면에서 설계도면 재생·특정화면 멈춰 장면 추가 및 AI 생성 장면 편집·삭제</a:t>
             </a:r>
           </a:p>
           <a:p>
@@ -15076,7 +15076,7 @@
             <a:r>
               <a:rPr sz="660" b="0">
                 <a:solidFill>
-                  <a:srgbClr val="1E293B"/>
+                  <a:srgbClr val="0F2942"/>
                 </a:solidFill>
                 <a:latin typeface="Malgun Gothic"/>
               </a:rPr>
@@ -15151,11 +15151,11 @@
             <a:r>
               <a:rPr sz="660" b="0">
                 <a:solidFill>
-                  <a:srgbClr val="1E293B"/>
+                  <a:srgbClr val="0F2942"/>
                 </a:solidFill>
                 <a:latin typeface="Malgun Gothic"/>
               </a:rPr>
-              <a:t>• 접근 통제: 마케팅허브 서버만 오픈된 대외연계 ALB를 통해서만 인바운드 접근 허용 (일반 사용자대역 접근 차단)</a:t>
+              <a:t>• 접근 통제: 전자구매포털 서버만 오픈된 대외연계 ALB를 통해서만 인바운드 접근 허용 (일반 사용자대역 접근 차단)</a:t>
             </a:r>
           </a:p>
           <a:p>
@@ -15163,11 +15163,11 @@
             <a:r>
               <a:rPr sz="660" b="0">
                 <a:solidFill>
-                  <a:srgbClr val="1E293B"/>
+                  <a:srgbClr val="0F2942"/>
                 </a:solidFill>
                 <a:latin typeface="Malgun Gothic"/>
               </a:rPr>
-              <a:t>• 대용량 처리: 300MB 시안·동영상 S3(Intelligent-Tiering) 업로드 및 EKS Service를 통한 AI Agent(:18083) 호출</a:t>
+              <a:t>• 대용량 처리: 300MB 계약·도서·설계도면 S3(Intelligent-Tiering) 업로드 및 EKS Service를 통한 AI Agent(:18083) 호출</a:t>
             </a:r>
           </a:p>
         </p:txBody>
@@ -15230,7 +15230,7 @@
                 </a:solidFill>
                 <a:latin typeface="Malgun Gothic"/>
               </a:rPr>
-              <a:t>★ 모듈 #4·#5 : AI 에이전트(:18083) &amp; 배치 워커(:18084) [AP 기본 제공 타입 적용]</a:t>
+              <a:t>★ 모듈 #4·#5 : AI 에이전트(:18083) &amp; 배치 워커(:18084) [HB 표준 제공 타입 적용]</a:t>
             </a:r>
           </a:p>
           <a:p>
@@ -15238,11 +15238,11 @@
             <a:r>
               <a:rPr sz="660" b="0">
                 <a:solidFill>
-                  <a:srgbClr val="1E293B"/>
+                  <a:srgbClr val="0F2942"/>
                 </a:solidFill>
                 <a:latin typeface="Malgun Gothic"/>
               </a:rPr>
-              <a:t>• AI Agent(:18083): OpenCV 영상 피크프레임 1차 자동추출 + 웹 보정 장면 분석, 네이버/패들 OCR, 동시 4건 큐, 1536d RAG</a:t>
+              <a:t>• AI Agent(:18083): OpenCV 영상 도면스냅샷 1차 자동추출 + 웹 보정 장면 분석, 엔터프라이즈 멀티모달 OCR, 동시 4건 큐, 1536d RAG</a:t>
             </a:r>
           </a:p>
           <a:p>
@@ -15250,11 +15250,11 @@
             <a:r>
               <a:rPr sz="660" b="0">
                 <a:solidFill>
-                  <a:srgbClr val="1E293B"/>
+                  <a:srgbClr val="0F2942"/>
                 </a:solidFill>
                 <a:latin typeface="Malgun Gothic"/>
               </a:rPr>
-              <a:t>• 스펙 원칙: AP 기본 제공 타입으로 구성하며, 성능 테스트 시 OOM 등 서비스 중단 이슈 반복 시 스펙 증설 요청</a:t>
+              <a:t>• 스펙 원칙: HB 표준 제공 타입으로 구성하며, 성능 테스트 시 OOM 등 서비스 중단 이슈 반복 시 스펙 증설 요청</a:t>
             </a:r>
           </a:p>
         </p:txBody>
@@ -15332,12 +15332,12 @@
             <a:r>
               <a:rPr sz="660" b="0">
                 <a:solidFill>
-                  <a:srgbClr val="1E293B"/>
+                  <a:srgbClr val="0F2942"/>
                 </a:solidFill>
                 <a:latin typeface="Malgun Gothic"/>
               </a:rPr>
-              <a:t>• 스테이지(STG): syncguard-ai-stg 네임스페이스 — 현업 UAT 및 마케팅허브·프로덕트랩 검증계 통합 테스트
-• 개발(DEV): syncguard-ai-dev 네임스페이스 — 5대 모듈(통합웹·업무BE·연계API·에이전트·배치) 개발계 컨테이너 구동</a:t>
+              <a:t>• 스테이지(STG): syncflow-ai-stg 네임스페이스 — 현업 UAT 및 전자구매포털·피엘엠넥서스 검증계 통합 테스트
+• 개발(DEV): syncflow-ai-dev 네임스페이스 — 5대 모듈(통합웹·업무BE·연계API·에이전트·배치) 개발계 컨테이너 구동</a:t>
             </a:r>
           </a:p>
         </p:txBody>
@@ -15516,7 +15516,7 @@
             <a:r>
               <a:rPr sz="690" b="0">
                 <a:solidFill>
-                  <a:srgbClr val="1E293B"/>
+                  <a:srgbClr val="0F2942"/>
                 </a:solidFill>
                 <a:latin typeface="Malgun Gothic"/>
               </a:rPr>
@@ -15528,7 +15528,7 @@
             <a:r>
               <a:rPr sz="690" b="0">
                 <a:solidFill>
-                  <a:srgbClr val="1E293B"/>
+                  <a:srgbClr val="0F2942"/>
                 </a:solidFill>
                 <a:latin typeface="Malgun Gothic"/>
               </a:rPr>
@@ -15540,7 +15540,7 @@
             <a:r>
               <a:rPr sz="690" b="0">
                 <a:solidFill>
-                  <a:srgbClr val="1E293B"/>
+                  <a:srgbClr val="0F2942"/>
                 </a:solidFill>
                 <a:latin typeface="Malgun Gothic"/>
               </a:rPr>
@@ -15552,7 +15552,7 @@
             <a:r>
               <a:rPr sz="690" b="0">
                 <a:solidFill>
-                  <a:srgbClr val="1E293B"/>
+                  <a:srgbClr val="0F2942"/>
                 </a:solidFill>
                 <a:latin typeface="Malgun Gothic"/>
               </a:rPr>
@@ -15564,7 +15564,7 @@
             <a:r>
               <a:rPr sz="690" b="0">
                 <a:solidFill>
-                  <a:srgbClr val="1E293B"/>
+                  <a:srgbClr val="0F2942"/>
                 </a:solidFill>
                 <a:latin typeface="Malgun Gothic"/>
               </a:rPr>
@@ -15639,11 +15639,11 @@
             <a:r>
               <a:rPr sz="690" b="0">
                 <a:solidFill>
-                  <a:srgbClr val="1E293B"/>
+                  <a:srgbClr val="0F2942"/>
                 </a:solidFill>
                 <a:latin typeface="Malgun Gothic"/>
               </a:rPr>
-              <a:t>• 환경별 버킷: ap-syncguard-ai-prd / stg / dev (SSE-S3 암호화)</a:t>
+              <a:t>• 환경별 버킷: ap-syncflow-ai-prd / stg / dev (SSE-S3 암호화)</a:t>
             </a:r>
           </a:p>
           <a:p>
@@ -15651,7 +15651,7 @@
             <a:r>
               <a:rPr sz="690" b="0">
                 <a:solidFill>
-                  <a:srgbClr val="1E293B"/>
+                  <a:srgbClr val="0F2942"/>
                 </a:solidFill>
                 <a:latin typeface="Malgun Gothic"/>
               </a:rPr>
@@ -15663,7 +15663,7 @@
             <a:r>
               <a:rPr sz="690" b="0">
                 <a:solidFill>
-                  <a:srgbClr val="1E293B"/>
+                  <a:srgbClr val="0F2942"/>
                 </a:solidFill>
                 <a:latin typeface="Malgun Gothic"/>
               </a:rPr>
@@ -15675,11 +15675,11 @@
             <a:r>
               <a:rPr sz="690" b="0">
                 <a:solidFill>
-                  <a:srgbClr val="1E293B"/>
+                  <a:srgbClr val="0F2942"/>
                 </a:solidFill>
                 <a:latin typeface="Malgun Gothic"/>
               </a:rPr>
-              <a:t>• 용도: 시안·영상 원본, AI 추출 및 웹 보정 장면, 리포트</a:t>
+              <a:t>• 용도: 계약·도서·영상 원본, AI 추출 및 웹 보정 장면, 리포트</a:t>
             </a:r>
           </a:p>
         </p:txBody>
@@ -15781,7 +15781,7 @@
                 </a:solidFill>
                 <a:latin typeface="Malgun Gothic"/>
               </a:rPr>
-              <a:t>BO/대외연계 ALB 물리 분리 · AP 기본 제공 스펙 적용(성능테스트 OOM 시 증설) · S3 Intelligent-Tiering · 네이버OCR 및 Outbound URL 방화벽 명세</a:t>
+              <a:t>BO/대외연계 ALB 물리 분리 · HB 표준 제공 스펙 적용(성능테스트 OOM 시 증설) · S3 Intelligent-Tiering · 비전OCR 및 Outbound URL 방화벽 명세</a:t>
             </a:r>
           </a:p>
         </p:txBody>
@@ -16103,7 +16103,7 @@
                       <a:r>
                         <a:rPr sz="660" b="1">
                           <a:solidFill>
-                            <a:srgbClr val="1E293B"/>
+                            <a:srgbClr val="0F2942"/>
                           </a:solidFill>
                           <a:latin typeface="Malgun Gothic"/>
                         </a:rPr>
@@ -16133,11 +16133,11 @@
                       <a:r>
                         <a:rPr sz="660" b="1">
                           <a:solidFill>
-                            <a:srgbClr val="1E293B"/>
+                            <a:srgbClr val="0F2942"/>
                           </a:solidFill>
                           <a:latin typeface="Malgun Gothic"/>
                         </a:rPr>
-                        <a:t>① BO ALB (syncguard-ai-bo-prv-alb)</a:t>
+                        <a:t>① BO ALB (syncflow-ai-bo-prv-alb)</a:t>
                       </a:r>
                     </a:p>
                     <a:p>
@@ -16145,11 +16145,11 @@
                       <a:r>
                         <a:rPr sz="660" b="1">
                           <a:solidFill>
-                            <a:srgbClr val="1E293B"/>
+                            <a:srgbClr val="0F2942"/>
                           </a:solidFill>
                           <a:latin typeface="Malgun Gothic"/>
                         </a:rPr>
-                        <a:t>② 연계 ALB (syncguard-ai-api-prv-alb)</a:t>
+                        <a:t>② 연계 ALB (syncflow-ai-api-prv-alb)</a:t>
                       </a:r>
                     </a:p>
                   </a:txBody>
@@ -16175,7 +16175,7 @@
                       <a:r>
                         <a:rPr sz="660" b="0">
                           <a:solidFill>
-                            <a:srgbClr val="1E293B"/>
+                            <a:srgbClr val="0F2942"/>
                           </a:solidFill>
                           <a:latin typeface="Malgun Gothic"/>
                         </a:rPr>
@@ -16187,7 +16187,7 @@
                       <a:r>
                         <a:rPr sz="660" b="0">
                           <a:solidFill>
-                            <a:srgbClr val="1E293B"/>
+                            <a:srgbClr val="0F2942"/>
                           </a:solidFill>
                           <a:latin typeface="Malgun Gothic"/>
                         </a:rPr>
@@ -16217,7 +16217,7 @@
                       <a:r>
                         <a:rPr sz="660" b="0">
                           <a:solidFill>
-                            <a:srgbClr val="1E293B"/>
+                            <a:srgbClr val="0F2942"/>
                           </a:solidFill>
                           <a:latin typeface="Malgun Gothic"/>
                         </a:rPr>
@@ -16247,7 +16247,7 @@
                       <a:r>
                         <a:rPr sz="660" b="0">
                           <a:solidFill>
-                            <a:srgbClr val="1E293B"/>
+                            <a:srgbClr val="0F2942"/>
                           </a:solidFill>
                           <a:latin typeface="Malgun Gothic"/>
                         </a:rPr>
@@ -16277,7 +16277,7 @@
                       <a:r>
                         <a:rPr sz="660" b="0">
                           <a:solidFill>
-                            <a:srgbClr val="1E293B"/>
+                            <a:srgbClr val="0F2942"/>
                           </a:solidFill>
                           <a:latin typeface="Malgun Gothic"/>
                         </a:rPr>
@@ -16307,11 +16307,11 @@
                       <a:r>
                         <a:rPr sz="660" b="0">
                           <a:solidFill>
-                            <a:srgbClr val="1E293B"/>
+                            <a:srgbClr val="0F2942"/>
                           </a:solidFill>
                           <a:latin typeface="Malgun Gothic"/>
                         </a:rPr>
-                        <a:t>[물리 분리] BO ALB: 사용자대역 오픈(통합웹 :3104 / 업무BE :18080) | 대외연계 ALB: 마케팅허브 서버만 오픈(대외API :18085)</a:t>
+                        <a:t>[물리 분리] BO ALB: 사용자대역 오픈(통합웹 :3104 / 업무BE :18080) | 대외연계 ALB: 전자구매포털 서버만 오픈(대외API :18085)</a:t>
                       </a:r>
                     </a:p>
                   </a:txBody>
@@ -16339,7 +16339,7 @@
                       <a:r>
                         <a:rPr sz="660" b="1">
                           <a:solidFill>
-                            <a:srgbClr val="1E293B"/>
+                            <a:srgbClr val="0F2942"/>
                           </a:solidFill>
                           <a:latin typeface="Malgun Gothic"/>
                         </a:rPr>
@@ -16369,7 +16369,7 @@
                       <a:r>
                         <a:rPr sz="660" b="1">
                           <a:solidFill>
-                            <a:srgbClr val="1E293B"/>
+                            <a:srgbClr val="0F2942"/>
                           </a:solidFill>
                           <a:latin typeface="Malgun Gothic"/>
                         </a:rPr>
@@ -16399,11 +16399,11 @@
                       <a:r>
                         <a:rPr sz="660" b="0">
                           <a:solidFill>
-                            <a:srgbClr val="1E293B"/>
+                            <a:srgbClr val="0F2942"/>
                           </a:solidFill>
                           <a:latin typeface="Malgun Gothic"/>
                         </a:rPr>
-                        <a:t>AP 기본 제공 타입 (Pod × 2)</a:t>
+                        <a:t>HB 표준 제공 타입 (Pod × 2)</a:t>
                       </a:r>
                     </a:p>
                     <a:p>
@@ -16411,7 +16411,7 @@
                       <a:r>
                         <a:rPr sz="660" b="0">
                           <a:solidFill>
-                            <a:srgbClr val="1E293B"/>
+                            <a:srgbClr val="0F2942"/>
                           </a:solidFill>
                           <a:latin typeface="Malgun Gothic"/>
                         </a:rPr>
@@ -16441,11 +16441,11 @@
                       <a:r>
                         <a:rPr sz="660" b="0">
                           <a:solidFill>
-                            <a:srgbClr val="1E293B"/>
+                            <a:srgbClr val="0F2942"/>
                           </a:solidFill>
                           <a:latin typeface="Malgun Gothic"/>
                         </a:rPr>
-                        <a:t>AP 기본 타입 (Pod × 1)</a:t>
+                        <a:t>HB 표준 타입 (Pod × 1)</a:t>
                       </a:r>
                     </a:p>
                   </a:txBody>
@@ -16471,11 +16471,11 @@
                       <a:r>
                         <a:rPr sz="660" b="0">
                           <a:solidFill>
-                            <a:srgbClr val="1E293B"/>
+                            <a:srgbClr val="0F2942"/>
                           </a:solidFill>
                           <a:latin typeface="Malgun Gothic"/>
                         </a:rPr>
-                        <a:t>AP 기본 타입 (Pod × 1)</a:t>
+                        <a:t>HB 표준 타입 (Pod × 1)</a:t>
                       </a:r>
                     </a:p>
                   </a:txBody>
@@ -16501,7 +16501,7 @@
                       <a:r>
                         <a:rPr sz="660" b="0">
                           <a:solidFill>
-                            <a:srgbClr val="1E293B"/>
+                            <a:srgbClr val="0F2942"/>
                           </a:solidFill>
                           <a:latin typeface="Malgun Gothic"/>
                         </a:rPr>
@@ -16531,11 +16531,11 @@
                       <a:r>
                         <a:rPr sz="660" b="0">
                           <a:solidFill>
-                            <a:srgbClr val="1E293B"/>
+                            <a:srgbClr val="0F2942"/>
                           </a:solidFill>
                           <a:latin typeface="Malgun Gothic"/>
                         </a:rPr>
-                        <a:t>BO ALB 연결 · 웹 동영상 재생 및 특정화면 멈춤 장면 추가 / AI 장면 편집·삭제 보정 · EKS Service로 AI Agent(:18083) 호출</a:t>
+                        <a:t>BO ALB 연결 · 웹 설계도면 재생 및 특정화면 멈춤 장면 추가 / AI 장면 편집·삭제 보정 · EKS Service로 AI Agent(:18083) 호출</a:t>
                       </a:r>
                     </a:p>
                   </a:txBody>
@@ -16563,7 +16563,7 @@
                       <a:r>
                         <a:rPr sz="660" b="1">
                           <a:solidFill>
-                            <a:srgbClr val="1E293B"/>
+                            <a:srgbClr val="0F2942"/>
                           </a:solidFill>
                           <a:latin typeface="Malgun Gothic"/>
                         </a:rPr>
@@ -16593,7 +16593,7 @@
                       <a:r>
                         <a:rPr sz="660" b="1">
                           <a:solidFill>
-                            <a:srgbClr val="1E293B"/>
+                            <a:srgbClr val="0F2942"/>
                           </a:solidFill>
                           <a:latin typeface="Malgun Gothic"/>
                         </a:rPr>
@@ -16623,11 +16623,11 @@
                       <a:r>
                         <a:rPr sz="660" b="0">
                           <a:solidFill>
-                            <a:srgbClr val="1E293B"/>
+                            <a:srgbClr val="0F2942"/>
                           </a:solidFill>
                           <a:latin typeface="Malgun Gothic"/>
                         </a:rPr>
-                        <a:t>AP 기본 제공 타입 (Pod × 2)</a:t>
+                        <a:t>HB 표준 제공 타입 (Pod × 2)</a:t>
                       </a:r>
                     </a:p>
                     <a:p>
@@ -16635,7 +16635,7 @@
                       <a:r>
                         <a:rPr sz="660" b="0">
                           <a:solidFill>
-                            <a:srgbClr val="1E293B"/>
+                            <a:srgbClr val="0F2942"/>
                           </a:solidFill>
                           <a:latin typeface="Malgun Gothic"/>
                         </a:rPr>
@@ -16665,11 +16665,11 @@
                       <a:r>
                         <a:rPr sz="660" b="0">
                           <a:solidFill>
-                            <a:srgbClr val="1E293B"/>
+                            <a:srgbClr val="0F2942"/>
                           </a:solidFill>
                           <a:latin typeface="Malgun Gothic"/>
                         </a:rPr>
-                        <a:t>AP 기본 타입 (Pod × 1)</a:t>
+                        <a:t>HB 표준 타입 (Pod × 1)</a:t>
                       </a:r>
                     </a:p>
                   </a:txBody>
@@ -16695,11 +16695,11 @@
                       <a:r>
                         <a:rPr sz="660" b="0">
                           <a:solidFill>
-                            <a:srgbClr val="1E293B"/>
+                            <a:srgbClr val="0F2942"/>
                           </a:solidFill>
                           <a:latin typeface="Malgun Gothic"/>
                         </a:rPr>
-                        <a:t>AP 기본 타입 (Pod × 1)</a:t>
+                        <a:t>HB 표준 타입 (Pod × 1)</a:t>
                       </a:r>
                     </a:p>
                   </a:txBody>
@@ -16725,7 +16725,7 @@
                       <a:r>
                         <a:rPr sz="660" b="0">
                           <a:solidFill>
-                            <a:srgbClr val="1E293B"/>
+                            <a:srgbClr val="0F2942"/>
                           </a:solidFill>
                           <a:latin typeface="Malgun Gothic"/>
                         </a:rPr>
@@ -16755,11 +16755,11 @@
                       <a:r>
                         <a:rPr sz="660" b="0">
                           <a:solidFill>
-                            <a:srgbClr val="1E293B"/>
+                            <a:srgbClr val="0F2942"/>
                           </a:solidFill>
                           <a:latin typeface="Malgun Gothic"/>
                         </a:rPr>
-                        <a:t>대외연계 ALB(마케팅허브만 오픈) 연결 · 300MB 시안·영상 S3(Intelligent-Tiering) 업로드 · EKS Service로 AI Agent(:18083) 호출</a:t>
+                        <a:t>대외연계 ALB(전자구매포털만 오픈) 연결 · 300MB 계약·도서·영상 S3(Intelligent-Tiering) 업로드 · EKS Service로 AI Agent(:18083) 호출</a:t>
                       </a:r>
                     </a:p>
                   </a:txBody>
@@ -16787,7 +16787,7 @@
                       <a:r>
                         <a:rPr sz="660" b="1">
                           <a:solidFill>
-                            <a:srgbClr val="1E293B"/>
+                            <a:srgbClr val="0F2942"/>
                           </a:solidFill>
                           <a:latin typeface="Malgun Gothic"/>
                         </a:rPr>
@@ -16817,7 +16817,7 @@
                       <a:r>
                         <a:rPr sz="660" b="1">
                           <a:solidFill>
-                            <a:srgbClr val="1E293B"/>
+                            <a:srgbClr val="0F2942"/>
                           </a:solidFill>
                           <a:latin typeface="Malgun Gothic"/>
                         </a:rPr>
@@ -16847,11 +16847,11 @@
                       <a:r>
                         <a:rPr sz="660" b="0">
                           <a:solidFill>
-                            <a:srgbClr val="1E293B"/>
+                            <a:srgbClr val="0F2942"/>
                           </a:solidFill>
                           <a:latin typeface="Malgun Gothic"/>
                         </a:rPr>
-                        <a:t>AP 기본 제공 타입 (4건 큐)</a:t>
+                        <a:t>HB 표준 제공 타입 (4건 큐)</a:t>
                       </a:r>
                     </a:p>
                     <a:p>
@@ -16859,7 +16859,7 @@
                       <a:r>
                         <a:rPr sz="660" b="0">
                           <a:solidFill>
-                            <a:srgbClr val="1E293B"/>
+                            <a:srgbClr val="0F2942"/>
                           </a:solidFill>
                           <a:latin typeface="Malgun Gothic"/>
                         </a:rPr>
@@ -16889,11 +16889,11 @@
                       <a:r>
                         <a:rPr sz="660" b="0">
                           <a:solidFill>
-                            <a:srgbClr val="1E293B"/>
+                            <a:srgbClr val="0F2942"/>
                           </a:solidFill>
                           <a:latin typeface="Malgun Gothic"/>
                         </a:rPr>
-                        <a:t>AP 기본 타입 (Pod × 1)</a:t>
+                        <a:t>HB 표준 타입 (Pod × 1)</a:t>
                       </a:r>
                     </a:p>
                   </a:txBody>
@@ -16919,11 +16919,11 @@
                       <a:r>
                         <a:rPr sz="660" b="0">
                           <a:solidFill>
-                            <a:srgbClr val="1E293B"/>
+                            <a:srgbClr val="0F2942"/>
                           </a:solidFill>
                           <a:latin typeface="Malgun Gothic"/>
                         </a:rPr>
-                        <a:t>AP 기본 타입 (Pod × 1)</a:t>
+                        <a:t>HB 표준 타입 (Pod × 1)</a:t>
                       </a:r>
                     </a:p>
                   </a:txBody>
@@ -16949,7 +16949,7 @@
                       <a:r>
                         <a:rPr sz="660" b="0">
                           <a:solidFill>
-                            <a:srgbClr val="1E293B"/>
+                            <a:srgbClr val="0F2942"/>
                           </a:solidFill>
                           <a:latin typeface="Malgun Gothic"/>
                         </a:rPr>
@@ -16979,11 +16979,11 @@
                       <a:r>
                         <a:rPr sz="660" b="0">
                           <a:solidFill>
-                            <a:srgbClr val="1E293B"/>
+                            <a:srgbClr val="0F2942"/>
                           </a:solidFill>
                           <a:latin typeface="Malgun Gothic"/>
                         </a:rPr>
-                        <a:t>OpenCV 영상 피크프레임 1차 자동추출 + 웹 보정 장면 분석, 네이버/패들 OCR 선택, 동시 4건 세마포어 + QUEUED 워커, 1536d RAG</a:t>
+                        <a:t>OpenCV 영상 도면스냅샷 1차 자동추출 + 웹 보정 장면 분석, 엔터프라이즈 멀티모달 OCR 선택, 동시 4건 세마포어 + QUEUED 워커, 1536d RAG</a:t>
                       </a:r>
                     </a:p>
                   </a:txBody>
@@ -17011,7 +17011,7 @@
                       <a:r>
                         <a:rPr sz="660" b="1">
                           <a:solidFill>
-                            <a:srgbClr val="1E293B"/>
+                            <a:srgbClr val="0F2942"/>
                           </a:solidFill>
                           <a:latin typeface="Malgun Gothic"/>
                         </a:rPr>
@@ -17041,7 +17041,7 @@
                       <a:r>
                         <a:rPr sz="660" b="1">
                           <a:solidFill>
-                            <a:srgbClr val="1E293B"/>
+                            <a:srgbClr val="0F2942"/>
                           </a:solidFill>
                           <a:latin typeface="Malgun Gothic"/>
                         </a:rPr>
@@ -17071,11 +17071,11 @@
                       <a:r>
                         <a:rPr sz="660" b="0">
                           <a:solidFill>
-                            <a:srgbClr val="1E293B"/>
+                            <a:srgbClr val="0F2942"/>
                           </a:solidFill>
                           <a:latin typeface="Malgun Gothic"/>
                         </a:rPr>
-                        <a:t>AP 기본 제공 타입 (Pod × 1)</a:t>
+                        <a:t>HB 표준 제공 타입 (Pod × 1)</a:t>
                       </a:r>
                     </a:p>
                     <a:p>
@@ -17083,7 +17083,7 @@
                       <a:r>
                         <a:rPr sz="660" b="0">
                           <a:solidFill>
-                            <a:srgbClr val="1E293B"/>
+                            <a:srgbClr val="0F2942"/>
                           </a:solidFill>
                           <a:latin typeface="Malgun Gothic"/>
                         </a:rPr>
@@ -17113,11 +17113,11 @@
                       <a:r>
                         <a:rPr sz="660" b="0">
                           <a:solidFill>
-                            <a:srgbClr val="1E293B"/>
+                            <a:srgbClr val="0F2942"/>
                           </a:solidFill>
                           <a:latin typeface="Malgun Gothic"/>
                         </a:rPr>
-                        <a:t>AP 기본 타입 (Pod × 1)</a:t>
+                        <a:t>HB 표준 타입 (Pod × 1)</a:t>
                       </a:r>
                     </a:p>
                   </a:txBody>
@@ -17143,11 +17143,11 @@
                       <a:r>
                         <a:rPr sz="660" b="0">
                           <a:solidFill>
-                            <a:srgbClr val="1E293B"/>
+                            <a:srgbClr val="0F2942"/>
                           </a:solidFill>
                           <a:latin typeface="Malgun Gothic"/>
                         </a:rPr>
-                        <a:t>AP 기본 타입 (Pod × 1)</a:t>
+                        <a:t>HB 표준 타입 (Pod × 1)</a:t>
                       </a:r>
                     </a:p>
                   </a:txBody>
@@ -17173,7 +17173,7 @@
                       <a:r>
                         <a:rPr sz="660" b="0">
                           <a:solidFill>
-                            <a:srgbClr val="1E293B"/>
+                            <a:srgbClr val="0F2942"/>
                           </a:solidFill>
                           <a:latin typeface="Malgun Gothic"/>
                         </a:rPr>
@@ -17207,7 +17207,7 @@
                           </a:solidFill>
                           <a:latin typeface="Malgun Gothic"/>
                         </a:rPr>
-                        <a:t>매일 새벽 02:00 ProductLab 전성분·실증 일배치(ProductLabDataSyncBatchJob), 02:30 [Option] KT레몬 배치</a:t>
+                        <a:t>매일 새벽 02:00 PLM-Nexus 자재BOM·시험검증 일배치(plmNexusDataSyncBatchJob), 02:30 [Option] HB-Monitor 배치</a:t>
                       </a:r>
                     </a:p>
                   </a:txBody>
@@ -17235,7 +17235,7 @@
                       <a:r>
                         <a:rPr sz="660" b="1">
                           <a:solidFill>
-                            <a:srgbClr val="1E293B"/>
+                            <a:srgbClr val="0F2942"/>
                           </a:solidFill>
                           <a:latin typeface="Malgun Gothic"/>
                         </a:rPr>
@@ -17265,7 +17265,7 @@
                       <a:r>
                         <a:rPr sz="660" b="1">
                           <a:solidFill>
-                            <a:srgbClr val="1E293B"/>
+                            <a:srgbClr val="0F2942"/>
                           </a:solidFill>
                           <a:latin typeface="Malgun Gothic"/>
                         </a:rPr>
@@ -17295,11 +17295,11 @@
                       <a:r>
                         <a:rPr sz="660" b="0">
                           <a:solidFill>
-                            <a:srgbClr val="1E293B"/>
+                            <a:srgbClr val="0F2942"/>
                           </a:solidFill>
                           <a:latin typeface="Malgun Gothic"/>
                         </a:rPr>
-                        <a:t>AP 기본 제공 타입 (Multi-AZ)</a:t>
+                        <a:t>HB 표준 제공 타입 (Multi-AZ)</a:t>
                       </a:r>
                     </a:p>
                     <a:p>
@@ -17307,7 +17307,7 @@
                       <a:r>
                         <a:rPr sz="660" b="0">
                           <a:solidFill>
-                            <a:srgbClr val="1E293B"/>
+                            <a:srgbClr val="0F2942"/>
                           </a:solidFill>
                           <a:latin typeface="Malgun Gothic"/>
                         </a:rPr>
@@ -17337,11 +17337,11 @@
                       <a:r>
                         <a:rPr sz="660" b="0">
                           <a:solidFill>
-                            <a:srgbClr val="1E293B"/>
+                            <a:srgbClr val="0F2942"/>
                           </a:solidFill>
                           <a:latin typeface="Malgun Gothic"/>
                         </a:rPr>
-                        <a:t>AP 기본 타입 (Single-AZ)</a:t>
+                        <a:t>HB 표준 타입 (Single-AZ)</a:t>
                       </a:r>
                     </a:p>
                   </a:txBody>
@@ -17367,11 +17367,11 @@
                       <a:r>
                         <a:rPr sz="660" b="0">
                           <a:solidFill>
-                            <a:srgbClr val="1E293B"/>
+                            <a:srgbClr val="0F2942"/>
                           </a:solidFill>
                           <a:latin typeface="Malgun Gothic"/>
                         </a:rPr>
-                        <a:t>AP 기본 타입 (Single-AZ)</a:t>
+                        <a:t>HB 표준 타입 (Single-AZ)</a:t>
                       </a:r>
                     </a:p>
                   </a:txBody>
@@ -17397,7 +17397,7 @@
                       <a:r>
                         <a:rPr sz="660" b="0">
                           <a:solidFill>
-                            <a:srgbClr val="1E293B"/>
+                            <a:srgbClr val="0F2942"/>
                           </a:solidFill>
                           <a:latin typeface="Malgun Gothic"/>
                         </a:rPr>
@@ -17427,7 +17427,7 @@
                       <a:r>
                         <a:rPr sz="660" b="0">
                           <a:solidFill>
-                            <a:srgbClr val="1E293B"/>
+                            <a:srgbClr val="0F2942"/>
                           </a:solidFill>
                           <a:latin typeface="Malgun Gothic"/>
                         </a:rPr>
@@ -17459,7 +17459,7 @@
                       <a:r>
                         <a:rPr sz="660" b="1">
                           <a:solidFill>
-                            <a:srgbClr val="1E293B"/>
+                            <a:srgbClr val="0F2942"/>
                           </a:solidFill>
                           <a:latin typeface="Malgun Gothic"/>
                         </a:rPr>
@@ -17489,7 +17489,7 @@
                       <a:r>
                         <a:rPr sz="660" b="1">
                           <a:solidFill>
-                            <a:srgbClr val="1E293B"/>
+                            <a:srgbClr val="0F2942"/>
                           </a:solidFill>
                           <a:latin typeface="Malgun Gothic"/>
                         </a:rPr>
@@ -17501,7 +17501,7 @@
                       <a:r>
                         <a:rPr sz="660" b="1">
                           <a:solidFill>
-                            <a:srgbClr val="1E293B"/>
+                            <a:srgbClr val="0F2942"/>
                           </a:solidFill>
                           <a:latin typeface="Malgun Gothic"/>
                         </a:rPr>
@@ -17531,11 +17531,11 @@
                       <a:r>
                         <a:rPr sz="660" b="0">
                           <a:solidFill>
-                            <a:srgbClr val="1E293B"/>
+                            <a:srgbClr val="0F2942"/>
                           </a:solidFill>
                           <a:latin typeface="Malgun Gothic"/>
                         </a:rPr>
-                        <a:t>ap-syncguard-ai-prd</a:t>
+                        <a:t>ap-syncflow-ai-prd</a:t>
                       </a:r>
                     </a:p>
                     <a:p>
@@ -17543,7 +17543,7 @@
                       <a:r>
                         <a:rPr sz="660" b="0">
                           <a:solidFill>
-                            <a:srgbClr val="1E293B"/>
+                            <a:srgbClr val="0F2942"/>
                           </a:solidFill>
                           <a:latin typeface="Malgun Gothic"/>
                         </a:rPr>
@@ -17573,11 +17573,11 @@
                       <a:r>
                         <a:rPr sz="660" b="0">
                           <a:solidFill>
-                            <a:srgbClr val="1E293B"/>
+                            <a:srgbClr val="0F2942"/>
                           </a:solidFill>
                           <a:latin typeface="Malgun Gothic"/>
                         </a:rPr>
-                        <a:t>ap-syncguard-ai-stg</a:t>
+                        <a:t>ap-syncflow-ai-stg</a:t>
                       </a:r>
                     </a:p>
                     <a:p>
@@ -17585,7 +17585,7 @@
                       <a:r>
                         <a:rPr sz="660" b="0">
                           <a:solidFill>
-                            <a:srgbClr val="1E293B"/>
+                            <a:srgbClr val="0F2942"/>
                           </a:solidFill>
                           <a:latin typeface="Malgun Gothic"/>
                         </a:rPr>
@@ -17615,11 +17615,11 @@
                       <a:r>
                         <a:rPr sz="660" b="0">
                           <a:solidFill>
-                            <a:srgbClr val="1E293B"/>
+                            <a:srgbClr val="0F2942"/>
                           </a:solidFill>
                           <a:latin typeface="Malgun Gothic"/>
                         </a:rPr>
-                        <a:t>ap-syncguard-ai-dev</a:t>
+                        <a:t>ap-syncflow-ai-dev</a:t>
                       </a:r>
                     </a:p>
                     <a:p>
@@ -17627,7 +17627,7 @@
                       <a:r>
                         <a:rPr sz="660" b="0">
                           <a:solidFill>
-                            <a:srgbClr val="1E293B"/>
+                            <a:srgbClr val="0F2942"/>
                           </a:solidFill>
                           <a:latin typeface="Malgun Gothic"/>
                         </a:rPr>
@@ -17657,7 +17657,7 @@
                       <a:r>
                         <a:rPr sz="660" b="0">
                           <a:solidFill>
-                            <a:srgbClr val="1E293B"/>
+                            <a:srgbClr val="0F2942"/>
                           </a:solidFill>
                           <a:latin typeface="Malgun Gothic"/>
                         </a:rPr>
@@ -17687,7 +17687,7 @@
                       <a:r>
                         <a:rPr sz="660" b="0">
                           <a:solidFill>
-                            <a:srgbClr val="1E293B"/>
+                            <a:srgbClr val="0F2942"/>
                           </a:solidFill>
                           <a:latin typeface="Malgun Gothic"/>
                         </a:rPr>
@@ -17992,7 +17992,7 @@
                       <a:r>
                         <a:rPr sz="660" b="1">
                           <a:solidFill>
-                            <a:srgbClr val="1E293B"/>
+                            <a:srgbClr val="0F2942"/>
                           </a:solidFill>
                           <a:latin typeface="Malgun Gothic"/>
                         </a:rPr>
@@ -18022,7 +18022,7 @@
                       <a:r>
                         <a:rPr sz="660" b="1">
                           <a:solidFill>
-                            <a:srgbClr val="1E293B"/>
+                            <a:srgbClr val="0F2942"/>
                           </a:solidFill>
                           <a:latin typeface="Malgun Gothic"/>
                         </a:rPr>
@@ -18052,11 +18052,11 @@
                       <a:r>
                         <a:rPr sz="660" b="1">
                           <a:solidFill>
-                            <a:srgbClr val="1E293B"/>
+                            <a:srgbClr val="0F2942"/>
                           </a:solidFill>
                           <a:latin typeface="Malgun Gothic"/>
                         </a:rPr>
-                        <a:t>BO 전용 ALB (syncguard-ai-bo-prv-alb)</a:t>
+                        <a:t>BO 전용 ALB (syncflow-ai-bo-prv-alb)</a:t>
                       </a:r>
                     </a:p>
                     <a:p>
@@ -18064,11 +18064,11 @@
                       <a:r>
                         <a:rPr sz="660" b="1">
                           <a:solidFill>
-                            <a:srgbClr val="1E293B"/>
+                            <a:srgbClr val="0F2942"/>
                           </a:solidFill>
                           <a:latin typeface="Malgun Gothic"/>
                         </a:rPr>
-                        <a:t>[Domain] https://claim.hanbitglobal.com</a:t>
+                        <a:t>[Domain] https://Spec.hanbitglobal.com</a:t>
                       </a:r>
                     </a:p>
                   </a:txBody>
@@ -18094,7 +18094,7 @@
                       <a:r>
                         <a:rPr sz="660" b="0">
                           <a:solidFill>
-                            <a:srgbClr val="1E293B"/>
+                            <a:srgbClr val="0F2942"/>
                           </a:solidFill>
                           <a:latin typeface="Malgun Gothic"/>
                         </a:rPr>
@@ -18124,7 +18124,7 @@
                       <a:r>
                         <a:rPr sz="660" b="0">
                           <a:solidFill>
-                            <a:srgbClr val="1E293B"/>
+                            <a:srgbClr val="0F2942"/>
                           </a:solidFill>
                           <a:latin typeface="Malgun Gothic"/>
                         </a:rPr>
@@ -18154,11 +18154,11 @@
                       <a:r>
                         <a:rPr sz="660" b="0">
                           <a:solidFill>
-                            <a:srgbClr val="1E293B"/>
+                            <a:srgbClr val="0F2942"/>
                           </a:solidFill>
                           <a:latin typeface="Malgun Gothic"/>
                         </a:rPr>
-                        <a:t>[BO ALB 사용자대역 오픈] RA·관리자 통합 웹(:3104) 및 업무BE(:18080) 접속 · 웹 영상 재생 및 장면 추가/편집/삭제 보정</a:t>
+                        <a:t>[BO ALB 사용자대역 오픈] QA·관리자 통합 웹(:3104) 및 업무BE(:18080) 접속 · 웹 영상 재생 및 장면 추가/편집/삭제 보정</a:t>
                       </a:r>
                     </a:p>
                   </a:txBody>
@@ -18186,7 +18186,7 @@
                       <a:r>
                         <a:rPr sz="660" b="1">
                           <a:solidFill>
-                            <a:srgbClr val="1E293B"/>
+                            <a:srgbClr val="0F2942"/>
                           </a:solidFill>
                           <a:latin typeface="Malgun Gothic"/>
                         </a:rPr>
@@ -18216,11 +18216,11 @@
                       <a:r>
                         <a:rPr sz="660" b="1">
                           <a:solidFill>
-                            <a:srgbClr val="1E293B"/>
+                            <a:srgbClr val="0F2942"/>
                           </a:solidFill>
                           <a:latin typeface="Malgun Gothic"/>
                         </a:rPr>
-                        <a:t>마케팅허브(MarketingHub) AP 서버 (단독)</a:t>
+                        <a:t>전자구매포털(SRM-Portal) HB 서버 (단독)</a:t>
                       </a:r>
                     </a:p>
                   </a:txBody>
@@ -18246,11 +18246,11 @@
                       <a:r>
                         <a:rPr sz="660" b="1">
                           <a:solidFill>
-                            <a:srgbClr val="1E293B"/>
+                            <a:srgbClr val="0F2942"/>
                           </a:solidFill>
                           <a:latin typeface="Malgun Gothic"/>
                         </a:rPr>
-                        <a:t>대외 연계 전용 ALB (syncguard-ai-api-prv-alb)</a:t>
+                        <a:t>대외 연계 전용 ALB (syncflow-ai-api-prv-alb)</a:t>
                       </a:r>
                     </a:p>
                     <a:p>
@@ -18258,11 +18258,11 @@
                       <a:r>
                         <a:rPr sz="660" b="1">
                           <a:solidFill>
-                            <a:srgbClr val="1E293B"/>
+                            <a:srgbClr val="0F2942"/>
                           </a:solidFill>
                           <a:latin typeface="Malgun Gothic"/>
                         </a:rPr>
-                        <a:t>[Domain] https://syncguard-api.hanbitglobal.com</a:t>
+                        <a:t>[Domain] https://syncflow-api.hanbitglobal.com</a:t>
                       </a:r>
                     </a:p>
                   </a:txBody>
@@ -18288,7 +18288,7 @@
                       <a:r>
                         <a:rPr sz="660" b="0">
                           <a:solidFill>
-                            <a:srgbClr val="1E293B"/>
+                            <a:srgbClr val="0F2942"/>
                           </a:solidFill>
                           <a:latin typeface="Malgun Gothic"/>
                         </a:rPr>
@@ -18318,7 +18318,7 @@
                       <a:r>
                         <a:rPr sz="660" b="0">
                           <a:solidFill>
-                            <a:srgbClr val="1E293B"/>
+                            <a:srgbClr val="0F2942"/>
                           </a:solidFill>
                           <a:latin typeface="Malgun Gothic"/>
                         </a:rPr>
@@ -18348,11 +18348,11 @@
                       <a:r>
                         <a:rPr sz="660" b="0">
                           <a:solidFill>
-                            <a:srgbClr val="1E293B"/>
+                            <a:srgbClr val="0F2942"/>
                           </a:solidFill>
                           <a:latin typeface="Malgun Gothic"/>
                         </a:rPr>
-                        <a:t>[대외연계 ALB 마케팅허브 서버만 오픈] 마케팅허브 ➔ 대외연계 API(:18085) 심의 의뢰 수신 및 파일 업로드 (일반 사용자대역 차단)</a:t>
+                        <a:t>[대외연계 ALB 전자구매포털 서버만 오픈] 전자구매포털 ➔ 대외연계 API(:18085) 검증 요청 수신 및 파일 업로드 (일반 사용자대역 차단)</a:t>
                       </a:r>
                     </a:p>
                   </a:txBody>
@@ -18380,7 +18380,7 @@
                       <a:r>
                         <a:rPr sz="660" b="1">
                           <a:solidFill>
-                            <a:srgbClr val="1E293B"/>
+                            <a:srgbClr val="0F2942"/>
                           </a:solidFill>
                           <a:latin typeface="Malgun Gothic"/>
                         </a:rPr>
@@ -18410,7 +18410,7 @@
                       <a:r>
                         <a:rPr sz="660" b="1">
                           <a:solidFill>
-                            <a:srgbClr val="1E293B"/>
+                            <a:srgbClr val="0F2942"/>
                           </a:solidFill>
                           <a:latin typeface="Malgun Gothic"/>
                         </a:rPr>
@@ -18440,11 +18440,11 @@
                       <a:r>
                         <a:rPr sz="660" b="1">
                           <a:solidFill>
-                            <a:srgbClr val="1E293B"/>
+                            <a:srgbClr val="0F2942"/>
                           </a:solidFill>
                           <a:latin typeface="Malgun Gothic"/>
                         </a:rPr>
-                        <a:t>AI Agent (http://syncguard-ai-agent-svc:18083)</a:t>
+                        <a:t>AI Agent (http://syncflow-ai-agent-svc:18083)</a:t>
                       </a:r>
                     </a:p>
                     <a:p>
@@ -18452,11 +18452,11 @@
                       <a:r>
                         <a:rPr sz="660" b="1">
                           <a:solidFill>
-                            <a:srgbClr val="1E293B"/>
+                            <a:srgbClr val="0F2942"/>
                           </a:solidFill>
                           <a:latin typeface="Malgun Gothic"/>
                         </a:rPr>
-                        <a:t>RDS(syncguard-db.hanbitglobal.com) · S3 Endpoint</a:t>
+                        <a:t>RDS(syncflow-db.hanbitglobal.com) · S3 Endpoint</a:t>
                       </a:r>
                     </a:p>
                   </a:txBody>
@@ -18482,7 +18482,7 @@
                       <a:r>
                         <a:rPr sz="660" b="0">
                           <a:solidFill>
-                            <a:srgbClr val="1E293B"/>
+                            <a:srgbClr val="0F2942"/>
                           </a:solidFill>
                           <a:latin typeface="Malgun Gothic"/>
                         </a:rPr>
@@ -18512,7 +18512,7 @@
                       <a:r>
                         <a:rPr sz="660" b="0">
                           <a:solidFill>
-                            <a:srgbClr val="1E293B"/>
+                            <a:srgbClr val="0F2942"/>
                           </a:solidFill>
                           <a:latin typeface="Malgun Gothic"/>
                         </a:rPr>
@@ -18542,7 +18542,7 @@
                       <a:r>
                         <a:rPr sz="660" b="0">
                           <a:solidFill>
-                            <a:srgbClr val="1E293B"/>
+                            <a:srgbClr val="0F2942"/>
                           </a:solidFill>
                           <a:latin typeface="Malgun Gothic"/>
                         </a:rPr>
@@ -18574,7 +18574,7 @@
                       <a:r>
                         <a:rPr sz="660" b="1">
                           <a:solidFill>
-                            <a:srgbClr val="1E293B"/>
+                            <a:srgbClr val="0F2942"/>
                           </a:solidFill>
                           <a:latin typeface="Malgun Gothic"/>
                         </a:rPr>
@@ -18604,7 +18604,7 @@
                       <a:r>
                         <a:rPr sz="660" b="1">
                           <a:solidFill>
-                            <a:srgbClr val="1E293B"/>
+                            <a:srgbClr val="0F2942"/>
                           </a:solidFill>
                           <a:latin typeface="Malgun Gothic"/>
                         </a:rPr>
@@ -18634,11 +18634,11 @@
                       <a:r>
                         <a:rPr sz="660" b="1">
                           <a:solidFill>
-                            <a:srgbClr val="1E293B"/>
+                            <a:srgbClr val="0F2942"/>
                           </a:solidFill>
                           <a:latin typeface="Malgun Gothic"/>
                         </a:rPr>
-                        <a:t>네이버 클로바 OCR (Naver Cloud CLOVA OCR)</a:t>
+                        <a:t>엔터프라이즈 비전 OCR (Enterprise Vision OCR)</a:t>
                       </a:r>
                     </a:p>
                     <a:p>
@@ -18646,11 +18646,11 @@
                       <a:r>
                         <a:rPr sz="660" b="1">
                           <a:solidFill>
-                            <a:srgbClr val="1E293B"/>
+                            <a:srgbClr val="0F2942"/>
                           </a:solidFill>
                           <a:latin typeface="Malgun Gothic"/>
                         </a:rPr>
-                        <a:t>[Outbound URL] https://*.apigw.ntruss.com</a:t>
+                        <a:t>[Outbound URL] https://ocr-api.hanbitglobal.internal</a:t>
                       </a:r>
                     </a:p>
                   </a:txBody>
@@ -18676,7 +18676,7 @@
                       <a:r>
                         <a:rPr sz="660" b="0">
                           <a:solidFill>
-                            <a:srgbClr val="1E293B"/>
+                            <a:srgbClr val="0F2942"/>
                           </a:solidFill>
                           <a:latin typeface="Malgun Gothic"/>
                         </a:rPr>
@@ -18706,7 +18706,7 @@
                       <a:r>
                         <a:rPr sz="660" b="0">
                           <a:solidFill>
-                            <a:srgbClr val="1E293B"/>
+                            <a:srgbClr val="0F2942"/>
                           </a:solidFill>
                           <a:latin typeface="Malgun Gothic"/>
                         </a:rPr>
@@ -18736,11 +18736,11 @@
                       <a:r>
                         <a:rPr sz="660" b="0">
                           <a:solidFill>
-                            <a:srgbClr val="1E293B"/>
+                            <a:srgbClr val="0F2942"/>
                           </a:solidFill>
                           <a:latin typeface="Malgun Gothic"/>
                         </a:rPr>
-                        <a:t>[네이버 OCR 방화벽 추가] 이미지 시안·AI 추출 피크프레임·웹 사용자 보정 캡처 장면 한글/영문 OCR 호출 (연구소 계약 APIGW URL)</a:t>
+                        <a:t>[엔터프라이즈 비전 OCR 방화벽 추가] 이미지 계약·도서·AI 추출 도면스냅샷·웹 사용자 보정 도면 스냅샷 한글/영문 OCR 호출 (연구소 계약 APIGW URL)</a:t>
                       </a:r>
                     </a:p>
                   </a:txBody>
@@ -18768,7 +18768,7 @@
                       <a:r>
                         <a:rPr sz="660" b="1">
                           <a:solidFill>
-                            <a:srgbClr val="1E293B"/>
+                            <a:srgbClr val="0F2942"/>
                           </a:solidFill>
                           <a:latin typeface="Malgun Gothic"/>
                         </a:rPr>
@@ -18798,7 +18798,7 @@
                       <a:r>
                         <a:rPr sz="660" b="1">
                           <a:solidFill>
-                            <a:srgbClr val="1E293B"/>
+                            <a:srgbClr val="0F2942"/>
                           </a:solidFill>
                           <a:latin typeface="Malgun Gothic"/>
                         </a:rPr>
@@ -18828,7 +18828,7 @@
                       <a:r>
                         <a:rPr sz="660" b="1">
                           <a:solidFill>
-                            <a:srgbClr val="1E293B"/>
+                            <a:srgbClr val="0F2942"/>
                           </a:solidFill>
                           <a:latin typeface="Malgun Gothic"/>
                         </a:rPr>
@@ -18840,7 +18840,7 @@
                       <a:r>
                         <a:rPr sz="660" b="1">
                           <a:solidFill>
-                            <a:srgbClr val="1E293B"/>
+                            <a:srgbClr val="0F2942"/>
                           </a:solidFill>
                           <a:latin typeface="Malgun Gothic"/>
                         </a:rPr>
@@ -18870,7 +18870,7 @@
                       <a:r>
                         <a:rPr sz="660" b="0">
                           <a:solidFill>
-                            <a:srgbClr val="1E293B"/>
+                            <a:srgbClr val="0F2942"/>
                           </a:solidFill>
                           <a:latin typeface="Malgun Gothic"/>
                         </a:rPr>
@@ -18900,7 +18900,7 @@
                       <a:r>
                         <a:rPr sz="660" b="0">
                           <a:solidFill>
-                            <a:srgbClr val="1E293B"/>
+                            <a:srgbClr val="0F2942"/>
                           </a:solidFill>
                           <a:latin typeface="Malgun Gothic"/>
                         </a:rPr>
@@ -18930,11 +18930,11 @@
                       <a:r>
                         <a:rPr sz="660" b="0">
                           <a:solidFill>
-                            <a:srgbClr val="1E293B"/>
+                            <a:srgbClr val="0F2942"/>
                           </a:solidFill>
                           <a:latin typeface="Malgun Gothic"/>
                         </a:rPr>
-                        <a:t>[Outbound URL 명시] 비학습(Zero Data Retention) 상용 LLM 3단계 심의 판정 및 1536차원 임베딩 API 호출</a:t>
+                        <a:t>[Outbound URL 명시] 비학습(Zero Data Retention) 상용 LLM 3단계 검증 판정 및 1536차원 임베딩 API 호출</a:t>
                       </a:r>
                     </a:p>
                   </a:txBody>
@@ -18962,7 +18962,7 @@
                       <a:r>
                         <a:rPr sz="660" b="1">
                           <a:solidFill>
-                            <a:srgbClr val="1E293B"/>
+                            <a:srgbClr val="0F2942"/>
                           </a:solidFill>
                           <a:latin typeface="Malgun Gothic"/>
                         </a:rPr>
@@ -18992,7 +18992,7 @@
                       <a:r>
                         <a:rPr sz="660" b="1">
                           <a:solidFill>
-                            <a:srgbClr val="1E293B"/>
+                            <a:srgbClr val="0F2942"/>
                           </a:solidFill>
                           <a:latin typeface="Malgun Gothic"/>
                         </a:rPr>
@@ -19022,11 +19022,11 @@
                       <a:r>
                         <a:rPr sz="660" b="1">
                           <a:solidFill>
-                            <a:srgbClr val="1E293B"/>
+                            <a:srgbClr val="0F2942"/>
                           </a:solidFill>
                           <a:latin typeface="Malgun Gothic"/>
                         </a:rPr>
-                        <a:t>마케팅허브(MarketingHub) 콜백 API &amp; 전성분 RDB 서버</a:t>
+                        <a:t>전자구매포털(SRM-Portal) 콜백 API &amp; 자재BOM RDB 서버</a:t>
                       </a:r>
                     </a:p>
                     <a:p>
@@ -19034,11 +19034,11 @@
                       <a:r>
                         <a:rPr sz="660" b="1">
                           <a:solidFill>
-                            <a:srgbClr val="1E293B"/>
+                            <a:srgbClr val="0F2942"/>
                           </a:solidFill>
                           <a:latin typeface="Malgun Gothic"/>
                         </a:rPr>
-                        <a:t>[Outbound URL] https://mkthub-api.hanbitglobal.com</a:t>
+                        <a:t>[Outbound URL] https://srm-api.hanbitglobal.com</a:t>
                       </a:r>
                     </a:p>
                   </a:txBody>
@@ -19064,7 +19064,7 @@
                       <a:r>
                         <a:rPr sz="660" b="0">
                           <a:solidFill>
-                            <a:srgbClr val="1E293B"/>
+                            <a:srgbClr val="0F2942"/>
                           </a:solidFill>
                           <a:latin typeface="Malgun Gothic"/>
                         </a:rPr>
@@ -19094,7 +19094,7 @@
                       <a:r>
                         <a:rPr sz="660" b="0">
                           <a:solidFill>
-                            <a:srgbClr val="1E293B"/>
+                            <a:srgbClr val="0F2942"/>
                           </a:solidFill>
                           <a:latin typeface="Malgun Gothic"/>
                         </a:rPr>
@@ -19124,11 +19124,11 @@
                       <a:r>
                         <a:rPr sz="660" b="0">
                           <a:solidFill>
-                            <a:srgbClr val="1E293B"/>
+                            <a:srgbClr val="0F2942"/>
                           </a:solidFill>
                           <a:latin typeface="Malgun Gothic"/>
                         </a:rPr>
-                        <a:t>[Outbound URL/서버 명시] SyncGuard AI ➔ 마케팅허브 심의 확정 결과(HTML/JSON/PDF) 웹훅 회신 및 마케팅허브 전성분·배합한도 RDB 조회</a:t>
+                        <a:t>[Outbound URL/서버 명시] SyncFlow AI ➔ 전자구매포털 검증 확정 결과(HTML/JSON/PDF) 웹훅 회신 및 전자구매포털 자재BOM·유해물질한도 RDB 조회</a:t>
                       </a:r>
                     </a:p>
                   </a:txBody>
@@ -19156,7 +19156,7 @@
                       <a:r>
                         <a:rPr sz="660" b="1">
                           <a:solidFill>
-                            <a:srgbClr val="1E293B"/>
+                            <a:srgbClr val="0F2942"/>
                           </a:solidFill>
                           <a:latin typeface="Malgun Gothic"/>
                         </a:rPr>
@@ -19186,7 +19186,7 @@
                       <a:r>
                         <a:rPr sz="660" b="1">
                           <a:solidFill>
-                            <a:srgbClr val="1E293B"/>
+                            <a:srgbClr val="0F2942"/>
                           </a:solidFill>
                           <a:latin typeface="Malgun Gothic"/>
                         </a:rPr>
@@ -19216,11 +19216,11 @@
                       <a:r>
                         <a:rPr sz="660" b="1">
                           <a:solidFill>
-                            <a:srgbClr val="1E293B"/>
+                            <a:srgbClr val="0F2942"/>
                           </a:solidFill>
                           <a:latin typeface="Malgun Gothic"/>
                         </a:rPr>
-                        <a:t>ProductLab (https://productlab-core.hanbitglobal.com)</a:t>
+                        <a:t>PLM-Nexus (https://plmnexus-core.hanbitglobal.com)</a:t>
                       </a:r>
                     </a:p>
                     <a:p>
@@ -19228,7 +19228,7 @@
                       <a:r>
                         <a:rPr sz="660" b="1">
                           <a:solidFill>
-                            <a:srgbClr val="1E293B"/>
+                            <a:srgbClr val="0F2942"/>
                           </a:solidFill>
                           <a:latin typeface="Malgun Gothic"/>
                         </a:rPr>
@@ -19258,7 +19258,7 @@
                       <a:r>
                         <a:rPr sz="660" b="0">
                           <a:solidFill>
-                            <a:srgbClr val="1E293B"/>
+                            <a:srgbClr val="0F2942"/>
                           </a:solidFill>
                           <a:latin typeface="Malgun Gothic"/>
                         </a:rPr>
@@ -19288,7 +19288,7 @@
                       <a:r>
                         <a:rPr sz="660" b="0">
                           <a:solidFill>
-                            <a:srgbClr val="1E293B"/>
+                            <a:srgbClr val="0F2942"/>
                           </a:solidFill>
                           <a:latin typeface="Malgun Gothic"/>
                         </a:rPr>
@@ -19318,11 +19318,11 @@
                       <a:r>
                         <a:rPr sz="660" b="0">
                           <a:solidFill>
-                            <a:srgbClr val="1E293B"/>
+                            <a:srgbClr val="0F2942"/>
                           </a:solidFill>
                           <a:latin typeface="Malgun Gothic"/>
                         </a:rPr>
-                        <a:t>[Outbound URL/서버 명시] 매일 02:00 ProductLab 실증배치 수집, HB-SSO SSO/IAM 권한 검증 및 연구원 실증요청 메일(SMTP) 발송</a:t>
+                        <a:t>[Outbound URL/서버 명시] 매일 02:00 PLM-Nexus 시험검증배치 수집, HB-SSO SSO/IAM 권한 검증 및 연구원 성적서요청 메일(SMTP) 발송</a:t>
                       </a:r>
                     </a:p>
                   </a:txBody>
@@ -19414,7 +19414,7 @@
                           </a:solidFill>
                           <a:latin typeface="Malgun Gothic"/>
                         </a:rPr>
-                        <a:t>[Option] KT 레몬(KT Lemon) API 서버</a:t>
+                        <a:t>[Option] HB-Monitor(KT Lemon) API 서버</a:t>
                       </a:r>
                     </a:p>
                     <a:p>
@@ -19516,7 +19516,7 @@
                           </a:solidFill>
                           <a:latin typeface="Malgun Gothic"/>
                         </a:rPr>
-                        <a:t>[선택 사양 · Outbound URL 명시] 매일 02:30 KT 레몬 임상·실증 문서 동기화 및 벡터 매칭 비교 검증(PoC) 확정 시 오픈</a:t>
+                        <a:t>[선택 사양 · Outbound URL 명시] 매일 02:30 HB-Monitor 신뢰성·시험검증 문서 동기화 및 벡터 매칭 비교 검증(PoC) 확정 시 오픈</a:t>
                       </a:r>
                     </a:p>
                   </a:txBody>
